--- a/Intelligent_Customer_Signal_Detector_Deck.pptx
+++ b/Intelligent_Customer_Signal_Detector_Deck.pptx
@@ -1405,39 +1405,6 @@
               </a:lnSpc>
               <a:buNone/>
             </a:pPr>
-            <a:r>
-              <a:rPr lang="en-US" sz="1450" dirty="0">
-                <a:solidFill>
-                  <a:srgbClr val="FFFFFF"/>
-                </a:solidFill>
-                <a:latin typeface="Calibri" panose="020F0502020204030204" pitchFamily="34" charset="0"/>
-                <a:ea typeface="Calibri" panose="020F0502020204030204" pitchFamily="34" charset="-122"/>
-                <a:cs typeface="Calibri" panose="020F0502020204030204" pitchFamily="34" charset="-120"/>
-              </a:rPr>
-              <a:t>Customer operations teams react </a:t>
-            </a:r>
-            <a:r>
-              <a:rPr lang="en-US" sz="1450" i="1" dirty="0">
-                <a:solidFill>
-                  <a:srgbClr val="FFFFFF"/>
-                </a:solidFill>
-                <a:latin typeface="Calibri" panose="020F0502020204030204" pitchFamily="34" charset="0"/>
-                <a:ea typeface="Calibri" panose="020F0502020204030204" pitchFamily="34" charset="-122"/>
-                <a:cs typeface="Calibri" panose="020F0502020204030204" pitchFamily="34" charset="-120"/>
-              </a:rPr>
-              <a:t>after</a:t>
-            </a:r>
-            <a:r>
-              <a:rPr lang="en-US" sz="1450" dirty="0">
-                <a:solidFill>
-                  <a:srgbClr val="FFFFFF"/>
-                </a:solidFill>
-                <a:latin typeface="Calibri" panose="020F0502020204030204" pitchFamily="34" charset="0"/>
-                <a:ea typeface="Calibri" panose="020F0502020204030204" pitchFamily="34" charset="-122"/>
-                <a:cs typeface="Calibri" panose="020F0502020204030204" pitchFamily="34" charset="-120"/>
-              </a:rPr>
-              <a:t> the fact — by the time a complaint escalates or a cancellation request lands, the chance to intervene has already passed.</a:t>
-            </a:r>
             <a:endParaRPr lang="en-US" sz="1450" dirty="0"/>
           </a:p>
         </p:txBody>
@@ -1477,7 +1444,63 @@
                 <a:ea typeface="Calibri" panose="020F0502020204030204" pitchFamily="34" charset="-122"/>
                 <a:cs typeface="Calibri" panose="020F0502020204030204" pitchFamily="34" charset="-120"/>
               </a:rPr>
-              <a:t>Signals exist — support chat logs, billing records, satisfaction scores — but they sit siloed across systems and are reviewed manually, one ticket at a time.</a:t>
+              <a:t>Signals exist — support chat logs, billing records, satisfaction scores — </a:t>
+            </a:r>
+            <a:r>
+              <a:rPr lang="en-US" sz="1450" dirty="0">
+                <a:solidFill>
+                  <a:srgbClr val="FFFFFF"/>
+                </a:solidFill>
+                <a:latin typeface="Calibri" panose="020F0502020204030204" pitchFamily="34" charset="0"/>
+                <a:ea typeface="Calibri" panose="020F0502020204030204" pitchFamily="34" charset="-122"/>
+                <a:cs typeface="Calibri" panose="020F0502020204030204" pitchFamily="34" charset="-120"/>
+                <a:sym typeface="+mn-ea"/>
+              </a:rPr>
+              <a:t>Customer operations teams react </a:t>
+            </a:r>
+            <a:r>
+              <a:rPr lang="en-US" sz="1450" i="1" dirty="0">
+                <a:solidFill>
+                  <a:srgbClr val="FFFFFF"/>
+                </a:solidFill>
+                <a:latin typeface="Calibri" panose="020F0502020204030204" pitchFamily="34" charset="0"/>
+                <a:ea typeface="Calibri" panose="020F0502020204030204" pitchFamily="34" charset="-122"/>
+                <a:cs typeface="Calibri" panose="020F0502020204030204" pitchFamily="34" charset="-120"/>
+                <a:sym typeface="+mn-ea"/>
+              </a:rPr>
+              <a:t>after</a:t>
+            </a:r>
+            <a:r>
+              <a:rPr lang="en-US" sz="1450" dirty="0">
+                <a:solidFill>
+                  <a:srgbClr val="FFFFFF"/>
+                </a:solidFill>
+                <a:latin typeface="Calibri" panose="020F0502020204030204" pitchFamily="34" charset="0"/>
+                <a:ea typeface="Calibri" panose="020F0502020204030204" pitchFamily="34" charset="-122"/>
+                <a:cs typeface="Calibri" panose="020F0502020204030204" pitchFamily="34" charset="-120"/>
+                <a:sym typeface="+mn-ea"/>
+              </a:rPr>
+              <a:t> the fact — by the time a complaint escalates or a cancellation request lands, the chance to intervene has already passed.</a:t>
+            </a:r>
+            <a:endParaRPr lang="en-US" sz="1450" dirty="0"/>
+          </a:p>
+          <a:p>
+            <a:pPr marL="0" indent="0">
+              <a:lnSpc>
+                <a:spcPct val="125000"/>
+              </a:lnSpc>
+              <a:buNone/>
+            </a:pPr>
+            <a:r>
+              <a:rPr lang="en-US" sz="1450" dirty="0">
+                <a:solidFill>
+                  <a:srgbClr val="9FC3C8"/>
+                </a:solidFill>
+                <a:latin typeface="Calibri" panose="020F0502020204030204" pitchFamily="34" charset="0"/>
+                <a:ea typeface="Calibri" panose="020F0502020204030204" pitchFamily="34" charset="-122"/>
+                <a:cs typeface="Calibri" panose="020F0502020204030204" pitchFamily="34" charset="-120"/>
+              </a:rPr>
+              <a:t>but they sit siloed across systems and are reviewed manually, one ticket at a time.</a:t>
             </a:r>
             <a:endParaRPr lang="en-US" sz="1450" dirty="0"/>
           </a:p>
